--- a/metro/metro-f05-market-update.pptx
+++ b/metro/metro-f05-market-update.pptx
@@ -3558,9 +3558,9 @@
                 <a:solidFill>
                   <a:srgbClr val="14161A"/>
                 </a:solidFill>
-                <a:latin typeface="Space Grotesk"/>
-                <a:ea typeface="Space Grotesk"/>
-                <a:cs typeface="Space Grotesk"/>
+                <a:latin typeface="HK Grotesk"/>
+                <a:ea typeface="HK Grotesk"/>
+                <a:cs typeface="HK Grotesk"/>
               </a:rPr>
               <a:t>NO</a:t>
             </a:r>
@@ -3597,9 +3597,9 @@
                 <a:solidFill>
                   <a:srgbClr val="14161A"/>
                 </a:solidFill>
-                <a:latin typeface="Space Grotesk"/>
-                <a:ea typeface="Space Grotesk"/>
-                <a:cs typeface="Space Grotesk"/>
+                <a:latin typeface="HK Grotesk"/>
+                <a:ea typeface="HK Grotesk"/>
+                <a:cs typeface="HK Grotesk"/>
               </a:rPr>
               <a:t>North &amp; Oak</a:t>
             </a:r>
@@ -3741,9 +3741,9 @@
                 <a:solidFill>
                   <a:srgbClr val="14161A"/>
                 </a:solidFill>
-                <a:latin typeface="Space Grotesk"/>
-                <a:ea typeface="Space Grotesk"/>
-                <a:cs typeface="Space Grotesk"/>
+                <a:latin typeface="HK Grotesk"/>
+                <a:ea typeface="HK Grotesk"/>
+                <a:cs typeface="HK Grotesk"/>
               </a:rPr>
               <a:t>Chicago, by the numbers.</a:t>
             </a:r>
@@ -3815,9 +3815,9 @@
                 <a:solidFill>
                   <a:srgbClr val="14161A"/>
                 </a:solidFill>
-                <a:latin typeface="Space Grotesk"/>
-                <a:ea typeface="Space Grotesk"/>
-                <a:cs typeface="Space Grotesk"/>
+                <a:latin typeface="HK Grotesk"/>
+                <a:ea typeface="HK Grotesk"/>
+                <a:cs typeface="HK Grotesk"/>
               </a:rPr>
               <a:t>$1.12M</a:t>
             </a:r>
@@ -3850,9 +3850,9 @@
                 <a:solidFill>
                   <a:srgbClr val="2D5BE3"/>
                 </a:solidFill>
-                <a:latin typeface="Space Grotesk"/>
-                <a:ea typeface="Space Grotesk"/>
-                <a:cs typeface="Space Grotesk"/>
+                <a:latin typeface="HK Grotesk"/>
+                <a:ea typeface="HK Grotesk"/>
+                <a:cs typeface="HK Grotesk"/>
               </a:rPr>
               <a:t>+ 2.8%</a:t>
             </a:r>
@@ -3885,9 +3885,9 @@
                 <a:solidFill>
                   <a:srgbClr val="8A8F99"/>
                 </a:solidFill>
-                <a:latin typeface="Space Grotesk"/>
-                <a:ea typeface="Space Grotesk"/>
-                <a:cs typeface="Space Grotesk"/>
+                <a:latin typeface="HK Grotesk"/>
+                <a:ea typeface="HK Grotesk"/>
+                <a:cs typeface="HK Grotesk"/>
               </a:rPr>
               <a:t>vs. prior month</a:t>
             </a:r>
@@ -3959,9 +3959,9 @@
                 <a:solidFill>
                   <a:srgbClr val="14161A"/>
                 </a:solidFill>
-                <a:latin typeface="Space Grotesk"/>
-                <a:ea typeface="Space Grotesk"/>
-                <a:cs typeface="Space Grotesk"/>
+                <a:latin typeface="HK Grotesk"/>
+                <a:ea typeface="HK Grotesk"/>
+                <a:cs typeface="HK Grotesk"/>
               </a:rPr>
               <a:t>24</a:t>
             </a:r>
@@ -3994,9 +3994,9 @@
                 <a:solidFill>
                   <a:srgbClr val="2D5BE3"/>
                 </a:solidFill>
-                <a:latin typeface="Space Grotesk"/>
-                <a:ea typeface="Space Grotesk"/>
-                <a:cs typeface="Space Grotesk"/>
+                <a:latin typeface="HK Grotesk"/>
+                <a:ea typeface="HK Grotesk"/>
+                <a:cs typeface="HK Grotesk"/>
               </a:rPr>
               <a:t>− 9 days</a:t>
             </a:r>
@@ -4029,9 +4029,9 @@
                 <a:solidFill>
                   <a:srgbClr val="8A8F99"/>
                 </a:solidFill>
-                <a:latin typeface="Space Grotesk"/>
-                <a:ea typeface="Space Grotesk"/>
-                <a:cs typeface="Space Grotesk"/>
+                <a:latin typeface="HK Grotesk"/>
+                <a:ea typeface="HK Grotesk"/>
+                <a:cs typeface="HK Grotesk"/>
               </a:rPr>
               <a:t>vs. prior month</a:t>
             </a:r>
@@ -4103,9 +4103,9 @@
                 <a:solidFill>
                   <a:srgbClr val="14161A"/>
                 </a:solidFill>
-                <a:latin typeface="Space Grotesk"/>
-                <a:ea typeface="Space Grotesk"/>
-                <a:cs typeface="Space Grotesk"/>
+                <a:latin typeface="HK Grotesk"/>
+                <a:ea typeface="HK Grotesk"/>
+                <a:cs typeface="HK Grotesk"/>
               </a:rPr>
               <a:t>188</a:t>
             </a:r>
@@ -4138,9 +4138,9 @@
                 <a:solidFill>
                   <a:srgbClr val="2D5BE3"/>
                 </a:solidFill>
-                <a:latin typeface="Space Grotesk"/>
-                <a:ea typeface="Space Grotesk"/>
-                <a:cs typeface="Space Grotesk"/>
+                <a:latin typeface="HK Grotesk"/>
+                <a:ea typeface="HK Grotesk"/>
+                <a:cs typeface="HK Grotesk"/>
               </a:rPr>
               <a:t>+ 14 listings</a:t>
             </a:r>
@@ -4173,9 +4173,9 @@
                 <a:solidFill>
                   <a:srgbClr val="8A8F99"/>
                 </a:solidFill>
-                <a:latin typeface="Space Grotesk"/>
-                <a:ea typeface="Space Grotesk"/>
-                <a:cs typeface="Space Grotesk"/>
+                <a:latin typeface="HK Grotesk"/>
+                <a:ea typeface="HK Grotesk"/>
+                <a:cs typeface="HK Grotesk"/>
               </a:rPr>
               <a:t>vs. prior month</a:t>
             </a:r>
@@ -4212,9 +4212,9 @@
                 <a:solidFill>
                   <a:srgbClr val="24272E"/>
                 </a:solidFill>
-                <a:latin typeface="Space Grotesk"/>
-                <a:ea typeface="Space Grotesk"/>
-                <a:cs typeface="Space Grotesk"/>
+                <a:latin typeface="HK Grotesk"/>
+                <a:ea typeface="HK Grotesk"/>
+                <a:cs typeface="HK Grotesk"/>
               </a:rPr>
               <a:t>Inventory is up, days-on-market are down, and city buyers are moving fast on well-priced condos. The window for sellers is real — and narrowing.</a:t>
             </a:r>
